--- a/publication/PLAN_ICDE.pptx
+++ b/publication/PLAN_ICDE.pptx
@@ -138,6 +138,45 @@
 
 <file path=ppt/changesInfos/changesInfo1.xml><?xml version="1.0" encoding="utf-8"?>
 <pc:chgInfo xmlns:a="http://schemas.openxmlformats.org/drawingml/2006/main" xmlns:r="http://schemas.openxmlformats.org/officeDocument/2006/relationships" xmlns:ac="http://schemas.microsoft.com/office/drawing/2013/main/command" xmlns:pc="http://schemas.microsoft.com/office/powerpoint/2013/main/command">
+  <pc:docChgLst>
+    <pc:chgData name="Tsz Nam Chan" userId="d72bc0ce159372cc" providerId="LiveId" clId="{7EA772CB-F43F-45EA-8D4F-488304E9E5E6}"/>
+    <pc:docChg chg="modSld">
+      <pc:chgData name="Tsz Nam Chan" userId="d72bc0ce159372cc" providerId="LiveId" clId="{7EA772CB-F43F-45EA-8D4F-488304E9E5E6}" dt="2026-04-27T10:36:19.672" v="1" actId="1076"/>
+      <pc:docMkLst>
+        <pc:docMk/>
+      </pc:docMkLst>
+      <pc:sldChg chg="modSp mod">
+        <pc:chgData name="Tsz Nam Chan" userId="d72bc0ce159372cc" providerId="LiveId" clId="{7EA772CB-F43F-45EA-8D4F-488304E9E5E6}" dt="2026-04-27T10:36:13.387" v="0" actId="1076"/>
+        <pc:sldMkLst>
+          <pc:docMk/>
+          <pc:sldMk cId="3158116359" sldId="267"/>
+        </pc:sldMkLst>
+        <pc:spChg chg="mod">
+          <ac:chgData name="Tsz Nam Chan" userId="d72bc0ce159372cc" providerId="LiveId" clId="{7EA772CB-F43F-45EA-8D4F-488304E9E5E6}" dt="2026-04-27T10:36:13.387" v="0" actId="1076"/>
+          <ac:spMkLst>
+            <pc:docMk/>
+            <pc:sldMk cId="3158116359" sldId="267"/>
+            <ac:spMk id="4" creationId="{0AE21E05-4035-6E32-006D-AA62C9367D97}"/>
+          </ac:spMkLst>
+        </pc:spChg>
+      </pc:sldChg>
+      <pc:sldChg chg="modSp mod">
+        <pc:chgData name="Tsz Nam Chan" userId="d72bc0ce159372cc" providerId="LiveId" clId="{7EA772CB-F43F-45EA-8D4F-488304E9E5E6}" dt="2026-04-27T10:36:19.672" v="1" actId="1076"/>
+        <pc:sldMkLst>
+          <pc:docMk/>
+          <pc:sldMk cId="4215093270" sldId="268"/>
+        </pc:sldMkLst>
+        <pc:spChg chg="mod">
+          <ac:chgData name="Tsz Nam Chan" userId="d72bc0ce159372cc" providerId="LiveId" clId="{7EA772CB-F43F-45EA-8D4F-488304E9E5E6}" dt="2026-04-27T10:36:19.672" v="1" actId="1076"/>
+          <ac:spMkLst>
+            <pc:docMk/>
+            <pc:sldMk cId="4215093270" sldId="268"/>
+            <ac:spMk id="3" creationId="{AB403D7E-5A7A-60BF-B336-BEB1B4038D0B}"/>
+          </ac:spMkLst>
+        </pc:spChg>
+      </pc:sldChg>
+    </pc:docChg>
+  </pc:docChgLst>
   <pc:docChgLst>
     <pc:chgData name="Tsz Nam Chan" userId="d72bc0ce159372cc" providerId="LiveId" clId="{D0A54EB6-4CA2-42C5-ABC6-C64AAD2F7BCD}"/>
     <pc:docChg chg="undo custSel addSld delSld modSld">
@@ -395,45 +434,6 @@
       </pc:sldChg>
     </pc:docChg>
   </pc:docChgLst>
-  <pc:docChgLst>
-    <pc:chgData name="Tsz Nam Chan" userId="d72bc0ce159372cc" providerId="LiveId" clId="{7EA772CB-F43F-45EA-8D4F-488304E9E5E6}"/>
-    <pc:docChg chg="modSld">
-      <pc:chgData name="Tsz Nam Chan" userId="d72bc0ce159372cc" providerId="LiveId" clId="{7EA772CB-F43F-45EA-8D4F-488304E9E5E6}" dt="2026-04-27T10:36:19.672" v="1" actId="1076"/>
-      <pc:docMkLst>
-        <pc:docMk/>
-      </pc:docMkLst>
-      <pc:sldChg chg="modSp mod">
-        <pc:chgData name="Tsz Nam Chan" userId="d72bc0ce159372cc" providerId="LiveId" clId="{7EA772CB-F43F-45EA-8D4F-488304E9E5E6}" dt="2026-04-27T10:36:13.387" v="0" actId="1076"/>
-        <pc:sldMkLst>
-          <pc:docMk/>
-          <pc:sldMk cId="3158116359" sldId="267"/>
-        </pc:sldMkLst>
-        <pc:spChg chg="mod">
-          <ac:chgData name="Tsz Nam Chan" userId="d72bc0ce159372cc" providerId="LiveId" clId="{7EA772CB-F43F-45EA-8D4F-488304E9E5E6}" dt="2026-04-27T10:36:13.387" v="0" actId="1076"/>
-          <ac:spMkLst>
-            <pc:docMk/>
-            <pc:sldMk cId="3158116359" sldId="267"/>
-            <ac:spMk id="4" creationId="{0AE21E05-4035-6E32-006D-AA62C9367D97}"/>
-          </ac:spMkLst>
-        </pc:spChg>
-      </pc:sldChg>
-      <pc:sldChg chg="modSp mod">
-        <pc:chgData name="Tsz Nam Chan" userId="d72bc0ce159372cc" providerId="LiveId" clId="{7EA772CB-F43F-45EA-8D4F-488304E9E5E6}" dt="2026-04-27T10:36:19.672" v="1" actId="1076"/>
-        <pc:sldMkLst>
-          <pc:docMk/>
-          <pc:sldMk cId="4215093270" sldId="268"/>
-        </pc:sldMkLst>
-        <pc:spChg chg="mod">
-          <ac:chgData name="Tsz Nam Chan" userId="d72bc0ce159372cc" providerId="LiveId" clId="{7EA772CB-F43F-45EA-8D4F-488304E9E5E6}" dt="2026-04-27T10:36:19.672" v="1" actId="1076"/>
-          <ac:spMkLst>
-            <pc:docMk/>
-            <pc:sldMk cId="4215093270" sldId="268"/>
-            <ac:spMk id="3" creationId="{AB403D7E-5A7A-60BF-B336-BEB1B4038D0B}"/>
-          </ac:spMkLst>
-        </pc:spChg>
-      </pc:sldChg>
-    </pc:docChg>
-  </pc:docChgLst>
 </pc:chgInfo>
 </file>
 
@@ -519,7 +519,7 @@
           <a:p>
             <a:fld id="{1F4E31A6-9336-4872-B963-AC75AAF5A368}" type="datetimeFigureOut">
               <a:rPr lang="zh-Hans-HK" altLang="en-US" smtClean="0"/>
-              <a:t>27/4/2026</a:t>
+              <a:t>29/4/2026</a:t>
             </a:fld>
             <a:endParaRPr lang="zh-Hans-HK" altLang="en-US"/>
           </a:p>
@@ -1104,7 +1104,7 @@
           <a:p>
             <a:fld id="{BD9AD34F-8D88-470C-84AD-7ABB9EDB168E}" type="datetime1">
               <a:rPr lang="zh-Hans-HK" altLang="en-US" smtClean="0"/>
-              <a:t>27/4/2026</a:t>
+              <a:t>29/4/2026</a:t>
             </a:fld>
             <a:endParaRPr lang="zh-Hans-HK" altLang="en-US"/>
           </a:p>
@@ -1304,7 +1304,7 @@
           <a:p>
             <a:fld id="{807D50B8-550F-4A39-B2BE-F4C9139F190E}" type="datetime1">
               <a:rPr lang="zh-Hans-HK" altLang="en-US" smtClean="0"/>
-              <a:t>27/4/2026</a:t>
+              <a:t>29/4/2026</a:t>
             </a:fld>
             <a:endParaRPr lang="zh-Hans-HK" altLang="en-US"/>
           </a:p>
@@ -1514,7 +1514,7 @@
           <a:p>
             <a:fld id="{F6339041-5D7F-468F-BA12-8FD6940B1F43}" type="datetime1">
               <a:rPr lang="zh-Hans-HK" altLang="en-US" smtClean="0"/>
-              <a:t>27/4/2026</a:t>
+              <a:t>29/4/2026</a:t>
             </a:fld>
             <a:endParaRPr lang="zh-Hans-HK" altLang="en-US"/>
           </a:p>
@@ -1714,7 +1714,7 @@
           <a:p>
             <a:fld id="{28AE4987-8759-4BC0-AF16-261773959FF8}" type="datetime1">
               <a:rPr lang="zh-Hans-HK" altLang="en-US" smtClean="0"/>
-              <a:t>27/4/2026</a:t>
+              <a:t>29/4/2026</a:t>
             </a:fld>
             <a:endParaRPr lang="zh-Hans-HK" altLang="en-US"/>
           </a:p>
@@ -1990,7 +1990,7 @@
           <a:p>
             <a:fld id="{49C89BBB-E748-4EB6-B6C0-90E79B862193}" type="datetime1">
               <a:rPr lang="zh-Hans-HK" altLang="en-US" smtClean="0"/>
-              <a:t>27/4/2026</a:t>
+              <a:t>29/4/2026</a:t>
             </a:fld>
             <a:endParaRPr lang="zh-Hans-HK" altLang="en-US"/>
           </a:p>
@@ -2258,7 +2258,7 @@
           <a:p>
             <a:fld id="{C32F1A91-6A16-4DCC-851B-468DF9947CBA}" type="datetime1">
               <a:rPr lang="zh-Hans-HK" altLang="en-US" smtClean="0"/>
-              <a:t>27/4/2026</a:t>
+              <a:t>29/4/2026</a:t>
             </a:fld>
             <a:endParaRPr lang="zh-Hans-HK" altLang="en-US"/>
           </a:p>
@@ -2673,7 +2673,7 @@
           <a:p>
             <a:fld id="{95637FB6-75E8-4D0A-BFF2-60EFD03568F5}" type="datetime1">
               <a:rPr lang="zh-Hans-HK" altLang="en-US" smtClean="0"/>
-              <a:t>27/4/2026</a:t>
+              <a:t>29/4/2026</a:t>
             </a:fld>
             <a:endParaRPr lang="zh-Hans-HK" altLang="en-US"/>
           </a:p>
@@ -2815,7 +2815,7 @@
           <a:p>
             <a:fld id="{119683FF-C808-4285-A2F1-39E0C3B1D445}" type="datetime1">
               <a:rPr lang="zh-Hans-HK" altLang="en-US" smtClean="0"/>
-              <a:t>27/4/2026</a:t>
+              <a:t>29/4/2026</a:t>
             </a:fld>
             <a:endParaRPr lang="zh-Hans-HK" altLang="en-US"/>
           </a:p>
@@ -2928,7 +2928,7 @@
           <a:p>
             <a:fld id="{7A9A3AC3-3550-49E5-9737-BE6A3571451D}" type="datetime1">
               <a:rPr lang="zh-Hans-HK" altLang="en-US" smtClean="0"/>
-              <a:t>27/4/2026</a:t>
+              <a:t>29/4/2026</a:t>
             </a:fld>
             <a:endParaRPr lang="zh-Hans-HK" altLang="en-US"/>
           </a:p>
@@ -3241,7 +3241,7 @@
           <a:p>
             <a:fld id="{E6EDB06F-10EB-46D6-AFD2-EF944D717C18}" type="datetime1">
               <a:rPr lang="zh-Hans-HK" altLang="en-US" smtClean="0"/>
-              <a:t>27/4/2026</a:t>
+              <a:t>29/4/2026</a:t>
             </a:fld>
             <a:endParaRPr lang="zh-Hans-HK" altLang="en-US"/>
           </a:p>
@@ -3530,7 +3530,7 @@
           <a:p>
             <a:fld id="{C7FABFB1-5093-4E5D-AE18-0543659C737B}" type="datetime1">
               <a:rPr lang="zh-Hans-HK" altLang="en-US" smtClean="0"/>
-              <a:t>27/4/2026</a:t>
+              <a:t>29/4/2026</a:t>
             </a:fld>
             <a:endParaRPr lang="zh-Hans-HK" altLang="en-US"/>
           </a:p>
@@ -3773,7 +3773,7 @@
           <a:p>
             <a:fld id="{8907CC75-CC47-4485-8CB4-946FB8731832}" type="datetime1">
               <a:rPr lang="zh-Hans-HK" altLang="en-US" smtClean="0"/>
-              <a:t>27/4/2026</a:t>
+              <a:t>29/4/2026</a:t>
             </a:fld>
             <a:endParaRPr lang="zh-Hans-HK" altLang="en-US"/>
           </a:p>
@@ -7448,8 +7448,8 @@
           </p:sp>
         </mc:Fallback>
       </mc:AlternateContent>
-      <mc:AlternateContent xmlns:mc="http://schemas.openxmlformats.org/markup-compatibility/2006" xmlns:a14="http://schemas.microsoft.com/office/drawing/2010/main">
-        <mc:Choice Requires="a14">
+      <mc:AlternateContent xmlns:mc="http://schemas.openxmlformats.org/markup-compatibility/2006">
+        <mc:Choice xmlns:a14="http://schemas.microsoft.com/office/drawing/2010/main" Requires="a14">
           <p:graphicFrame>
             <p:nvGraphicFramePr>
               <p:cNvPr id="10" name="Table 9">
@@ -7465,14 +7465,14 @@
               <p:nvPr>
                 <p:extLst>
                   <p:ext uri="{D42A27DB-BD31-4B8C-83A1-F6EECF244321}">
-                    <p14:modId xmlns:p14="http://schemas.microsoft.com/office/powerpoint/2010/main" val="1115815187"/>
+                    <p14:modId xmlns:p14="http://schemas.microsoft.com/office/powerpoint/2010/main" val="191866473"/>
                   </p:ext>
                 </p:extLst>
               </p:nvPr>
             </p:nvGraphicFramePr>
             <p:xfrm>
               <a:off x="74950" y="4161719"/>
-              <a:ext cx="7075358" cy="2604453"/>
+              <a:ext cx="7075358" cy="2433384"/>
             </p:xfrm>
             <a:graphic>
               <a:graphicData uri="http://schemas.openxmlformats.org/drawingml/2006/table">
@@ -7820,8 +7820,8 @@
                                               </m:r>
                                             </m:num>
                                             <m:den>
-                                              <m:sSubSup>
-                                                <m:sSubSupPr>
+                                              <m:sSup>
+                                                <m:sSupPr>
                                                   <m:ctrlPr>
                                                     <a:rPr lang="en-US" altLang="zh-CN" sz="2200" b="0" i="1" smtClean="0">
                                                       <a:solidFill>
@@ -7831,7 +7831,7 @@
                                                       <a:cs typeface="Times New Roman" panose="02020603050405020304" pitchFamily="18" charset="0"/>
                                                     </a:rPr>
                                                   </m:ctrlPr>
-                                                </m:sSubSupPr>
+                                                </m:sSupPr>
                                                 <m:e>
                                                   <m:r>
                                                     <a:rPr lang="en-US" altLang="zh-CN" sz="2200" b="0" i="1" smtClean="0">
@@ -7844,18 +7844,6 @@
                                                     <m:t>𝑏</m:t>
                                                   </m:r>
                                                 </m:e>
-                                                <m:sub>
-                                                  <m:r>
-                                                    <a:rPr lang="en-US" altLang="zh-CN" sz="2200" b="0" i="1" smtClean="0">
-                                                      <a:solidFill>
-                                                        <a:schemeClr val="tx1"/>
-                                                      </a:solidFill>
-                                                      <a:latin typeface="Cambria Math" panose="02040503050406030204" pitchFamily="18" charset="0"/>
-                                                      <a:cs typeface="Times New Roman" panose="02020603050405020304" pitchFamily="18" charset="0"/>
-                                                    </a:rPr>
-                                                    <m:t>𝐺</m:t>
-                                                  </m:r>
-                                                </m:sub>
                                                 <m:sup>
                                                   <m:r>
                                                     <a:rPr lang="en-US" altLang="zh-CN" sz="2200" b="0" i="1" smtClean="0">
@@ -7868,7 +7856,7 @@
                                                     <m:t>2</m:t>
                                                   </m:r>
                                                 </m:sup>
-                                              </m:sSubSup>
+                                              </m:sSup>
                                             </m:den>
                                           </m:f>
                                           <m:sSup>
@@ -8138,43 +8126,16 @@
                                             </a:rPr>
                                             <m:t>≤</m:t>
                                           </m:r>
-                                          <m:sSub>
-                                            <m:sSubPr>
-                                              <m:ctrlPr>
-                                                <a:rPr lang="en-US" altLang="zh-CN" sz="2200" b="0" i="1" smtClean="0">
-                                                  <a:solidFill>
-                                                    <a:schemeClr val="tx1"/>
-                                                  </a:solidFill>
-                                                  <a:latin typeface="Cambria Math" panose="02040503050406030204" pitchFamily="18" charset="0"/>
-                                                  <a:cs typeface="Times New Roman" panose="02020603050405020304" pitchFamily="18" charset="0"/>
-                                                </a:rPr>
-                                              </m:ctrlPr>
-                                            </m:sSubPr>
-                                            <m:e>
-                                              <m:r>
-                                                <a:rPr lang="en-US" altLang="zh-CN" sz="2200" b="0" i="1" smtClean="0">
-                                                  <a:solidFill>
-                                                    <a:schemeClr val="tx1"/>
-                                                  </a:solidFill>
-                                                  <a:latin typeface="Cambria Math" panose="02040503050406030204" pitchFamily="18" charset="0"/>
-                                                  <a:cs typeface="Times New Roman" panose="02020603050405020304" pitchFamily="18" charset="0"/>
-                                                </a:rPr>
-                                                <m:t>𝑏</m:t>
-                                              </m:r>
-                                            </m:e>
-                                            <m:sub>
-                                              <m:r>
-                                                <a:rPr lang="en-US" altLang="zh-CN" sz="2200" b="0" i="1" smtClean="0">
-                                                  <a:solidFill>
-                                                    <a:schemeClr val="tx1"/>
-                                                  </a:solidFill>
-                                                  <a:latin typeface="Cambria Math" panose="02040503050406030204" pitchFamily="18" charset="0"/>
-                                                  <a:cs typeface="Times New Roman" panose="02020603050405020304" pitchFamily="18" charset="0"/>
-                                                </a:rPr>
-                                                <m:t>𝐺</m:t>
-                                              </m:r>
-                                            </m:sub>
-                                          </m:sSub>
+                                          <m:r>
+                                            <a:rPr lang="en-US" altLang="zh-CN" sz="2200" b="0" i="1" smtClean="0">
+                                              <a:solidFill>
+                                                <a:schemeClr val="tx1"/>
+                                              </a:solidFill>
+                                              <a:latin typeface="Cambria Math" panose="02040503050406030204" pitchFamily="18" charset="0"/>
+                                              <a:cs typeface="Times New Roman" panose="02020603050405020304" pitchFamily="18" charset="0"/>
+                                            </a:rPr>
+                                            <m:t>𝑏</m:t>
+                                          </m:r>
                                         </m:e>
                                       </m:mr>
                                       <m:mr>
@@ -8443,8 +8404,8 @@
                                         </m:r>
                                       </m:num>
                                       <m:den>
-                                        <m:sSubSup>
-                                          <m:sSubSupPr>
+                                        <m:sSup>
+                                          <m:sSupPr>
                                             <m:ctrlPr>
                                               <a:rPr lang="en-US" altLang="zh-CN" sz="2200" b="0" i="1" smtClean="0">
                                                 <a:solidFill>
@@ -8454,7 +8415,7 @@
                                                 <a:cs typeface="Times New Roman" panose="02020603050405020304" pitchFamily="18" charset="0"/>
                                               </a:rPr>
                                             </m:ctrlPr>
-                                          </m:sSubSupPr>
+                                          </m:sSupPr>
                                           <m:e>
                                             <m:r>
                                               <a:rPr lang="en-US" altLang="zh-CN" sz="2200" b="0" i="1" smtClean="0">
@@ -8467,18 +8428,6 @@
                                               <m:t>𝑏</m:t>
                                             </m:r>
                                           </m:e>
-                                          <m:sub>
-                                            <m:r>
-                                              <a:rPr lang="en-US" altLang="zh-CN" sz="2200" b="0" i="1" smtClean="0">
-                                                <a:solidFill>
-                                                  <a:schemeClr val="tx1"/>
-                                                </a:solidFill>
-                                                <a:latin typeface="Cambria Math" panose="02040503050406030204" pitchFamily="18" charset="0"/>
-                                                <a:cs typeface="Times New Roman" panose="02020603050405020304" pitchFamily="18" charset="0"/>
-                                              </a:rPr>
-                                              <m:t>𝐺</m:t>
-                                            </m:r>
-                                          </m:sub>
                                           <m:sup>
                                             <m:r>
                                               <a:rPr lang="en-US" altLang="zh-CN" sz="2200" b="0" i="1" smtClean="0">
@@ -8491,7 +8440,7 @@
                                               <m:t>2</m:t>
                                             </m:r>
                                           </m:sup>
-                                        </m:sSubSup>
+                                        </m:sSup>
                                       </m:den>
                                     </m:f>
                                     <m:sSup>
@@ -8679,7 +8628,7 @@
             </a:graphic>
           </p:graphicFrame>
         </mc:Choice>
-        <mc:Fallback xmlns="">
+        <mc:Fallback>
           <p:graphicFrame>
             <p:nvGraphicFramePr>
               <p:cNvPr id="10" name="Table 9">
@@ -8695,14 +8644,14 @@
               <p:nvPr>
                 <p:extLst>
                   <p:ext uri="{D42A27DB-BD31-4B8C-83A1-F6EECF244321}">
-                    <p14:modId xmlns:p14="http://schemas.microsoft.com/office/powerpoint/2010/main" val="1115815187"/>
+                    <p14:modId xmlns:p14="http://schemas.microsoft.com/office/powerpoint/2010/main" val="191866473"/>
                   </p:ext>
                 </p:extLst>
               </p:nvPr>
             </p:nvGraphicFramePr>
             <p:xfrm>
               <a:off x="74950" y="4161719"/>
-              <a:ext cx="7075358" cy="2604453"/>
+              <a:ext cx="7075358" cy="2433384"/>
             </p:xfrm>
             <a:graphic>
               <a:graphicData uri="http://schemas.openxmlformats.org/drawingml/2006/table">
@@ -8879,7 +8828,7 @@
                       </a:ext>
                     </a:extLst>
                   </a:tr>
-                  <a:tr h="1332929">
+                  <a:tr h="1161860">
                     <a:tc>
                       <a:txBody>
                         <a:bodyPr/>
@@ -8958,7 +8907,7 @@
                         <a:bodyPr/>
                         <a:lstStyle/>
                         <a:p>
-                          <a:endParaRPr lang="zh-CN"/>
+                          <a:endParaRPr lang="zh-Hans-HK"/>
                         </a:p>
                       </a:txBody>
                       <a:tcPr>
@@ -9009,7 +8958,7 @@
                         <a:blipFill>
                           <a:blip r:embed="rId5"/>
                           <a:stretch>
-                            <a:fillRect l="-36706" t="-34703" r="-353" b="-64840"/>
+                            <a:fillRect l="-36706" t="-39791" r="-353" b="-73822"/>
                           </a:stretch>
                         </a:blipFill>
                       </a:tcPr>
@@ -9099,7 +9048,7 @@
                         <a:bodyPr/>
                         <a:lstStyle/>
                         <a:p>
-                          <a:endParaRPr lang="zh-CN"/>
+                          <a:endParaRPr lang="zh-Hans-HK"/>
                         </a:p>
                       </a:txBody>
                       <a:tcPr>
@@ -9150,7 +9099,7 @@
                         <a:blipFill>
                           <a:blip r:embed="rId5"/>
                           <a:stretch>
-                            <a:fillRect l="-36706" t="-212230" r="-353" b="-2158"/>
+                            <a:fillRect l="-36706" t="-192086" r="-353" b="-1439"/>
                           </a:stretch>
                         </a:blipFill>
                       </a:tcPr>
@@ -9901,8 +9850,8 @@
           </p:sp>
         </mc:Fallback>
       </mc:AlternateContent>
-      <mc:AlternateContent xmlns:mc="http://schemas.openxmlformats.org/markup-compatibility/2006" xmlns:a14="http://schemas.microsoft.com/office/drawing/2010/main">
-        <mc:Choice Requires="a14">
+      <mc:AlternateContent xmlns:mc="http://schemas.openxmlformats.org/markup-compatibility/2006">
+        <mc:Choice xmlns:a14="http://schemas.microsoft.com/office/drawing/2010/main" Requires="a14">
           <p:sp>
             <p:nvSpPr>
               <p:cNvPr id="5" name="TextBox 4">
@@ -9917,8 +9866,8 @@
             </p:nvSpPr>
             <p:spPr>
               <a:xfrm>
-                <a:off x="1270000" y="2819200"/>
-                <a:ext cx="5016500" cy="1459887"/>
+                <a:off x="1270000" y="2923801"/>
+                <a:ext cx="5016500" cy="1271438"/>
               </a:xfrm>
               <a:prstGeom prst="rect">
                 <a:avLst/>
@@ -10023,55 +9972,34 @@
                                     </m:r>
                                   </m:num>
                                   <m:den>
-                                    <m:sSubSup>
-                                      <m:sSubSupPr>
+                                    <m:sSup>
+                                      <m:sSupPr>
                                         <m:ctrlPr>
-                                          <a:rPr lang="en-US" altLang="zh-CN" sz="2400" b="0" i="1" smtClean="0">
-                                            <a:solidFill>
-                                              <a:schemeClr val="tx1"/>
-                                            </a:solidFill>
+                                          <a:rPr lang="en-US" altLang="zh-CN" sz="2400" i="1">
                                             <a:latin typeface="Cambria Math" panose="02040503050406030204" pitchFamily="18" charset="0"/>
                                             <a:cs typeface="Times New Roman" panose="02020603050405020304" pitchFamily="18" charset="0"/>
                                           </a:rPr>
                                         </m:ctrlPr>
-                                      </m:sSubSupPr>
+                                      </m:sSupPr>
                                       <m:e>
                                         <m:r>
-                                          <a:rPr lang="en-US" altLang="zh-CN" sz="2400" b="0" i="1" smtClean="0">
-                                            <a:solidFill>
-                                              <a:schemeClr val="tx1"/>
-                                            </a:solidFill>
+                                          <a:rPr lang="en-US" altLang="zh-CN" sz="2400" i="1">
                                             <a:latin typeface="Cambria Math" panose="02040503050406030204" pitchFamily="18" charset="0"/>
                                             <a:cs typeface="Times New Roman" panose="02020603050405020304" pitchFamily="18" charset="0"/>
                                           </a:rPr>
                                           <m:t>𝑏</m:t>
                                         </m:r>
                                       </m:e>
-                                      <m:sub>
-                                        <m:r>
-                                          <a:rPr lang="en-US" altLang="zh-CN" sz="2400" b="0" i="1" smtClean="0">
-                                            <a:solidFill>
-                                              <a:schemeClr val="tx1"/>
-                                            </a:solidFill>
-                                            <a:latin typeface="Cambria Math" panose="02040503050406030204" pitchFamily="18" charset="0"/>
-                                            <a:cs typeface="Times New Roman" panose="02020603050405020304" pitchFamily="18" charset="0"/>
-                                          </a:rPr>
-                                          <m:t>𝐺</m:t>
-                                        </m:r>
-                                      </m:sub>
                                       <m:sup>
                                         <m:r>
-                                          <a:rPr lang="en-US" altLang="zh-CN" sz="2400" b="0" i="1" smtClean="0">
-                                            <a:solidFill>
-                                              <a:schemeClr val="tx1"/>
-                                            </a:solidFill>
+                                          <a:rPr lang="en-US" altLang="zh-CN" sz="2400" i="1">
                                             <a:latin typeface="Cambria Math" panose="02040503050406030204" pitchFamily="18" charset="0"/>
                                             <a:cs typeface="Times New Roman" panose="02020603050405020304" pitchFamily="18" charset="0"/>
                                           </a:rPr>
                                           <m:t>2</m:t>
                                         </m:r>
                                       </m:sup>
-                                    </m:sSubSup>
+                                    </m:sSup>
                                   </m:den>
                                 </m:f>
                                 <m:sSup>
@@ -10341,43 +10269,13 @@
                                   </a:rPr>
                                   <m:t>≤</m:t>
                                 </m:r>
-                                <m:sSub>
-                                  <m:sSubPr>
-                                    <m:ctrlPr>
-                                      <a:rPr lang="en-US" altLang="zh-CN" sz="2400" b="0" i="1" smtClean="0">
-                                        <a:solidFill>
-                                          <a:schemeClr val="tx1"/>
-                                        </a:solidFill>
-                                        <a:latin typeface="Cambria Math" panose="02040503050406030204" pitchFamily="18" charset="0"/>
-                                        <a:cs typeface="Times New Roman" panose="02020603050405020304" pitchFamily="18" charset="0"/>
-                                      </a:rPr>
-                                    </m:ctrlPr>
-                                  </m:sSubPr>
-                                  <m:e>
-                                    <m:r>
-                                      <a:rPr lang="en-US" altLang="zh-CN" sz="2400" b="0" i="1" smtClean="0">
-                                        <a:solidFill>
-                                          <a:schemeClr val="tx1"/>
-                                        </a:solidFill>
-                                        <a:latin typeface="Cambria Math" panose="02040503050406030204" pitchFamily="18" charset="0"/>
-                                        <a:cs typeface="Times New Roman" panose="02020603050405020304" pitchFamily="18" charset="0"/>
-                                      </a:rPr>
-                                      <m:t>𝑏</m:t>
-                                    </m:r>
-                                  </m:e>
-                                  <m:sub>
-                                    <m:r>
-                                      <a:rPr lang="en-US" altLang="zh-CN" sz="2400" b="0" i="1" smtClean="0">
-                                        <a:solidFill>
-                                          <a:schemeClr val="tx1"/>
-                                        </a:solidFill>
-                                        <a:latin typeface="Cambria Math" panose="02040503050406030204" pitchFamily="18" charset="0"/>
-                                        <a:cs typeface="Times New Roman" panose="02020603050405020304" pitchFamily="18" charset="0"/>
-                                      </a:rPr>
-                                      <m:t>𝐺</m:t>
-                                    </m:r>
-                                  </m:sub>
-                                </m:sSub>
+                                <m:r>
+                                  <a:rPr lang="en-US" altLang="zh-CN" sz="2400" i="1">
+                                    <a:latin typeface="Cambria Math" panose="02040503050406030204" pitchFamily="18" charset="0"/>
+                                    <a:cs typeface="Times New Roman" panose="02020603050405020304" pitchFamily="18" charset="0"/>
+                                  </a:rPr>
+                                  <m:t>𝑏</m:t>
+                                </m:r>
                               </m:e>
                             </m:mr>
                             <m:mr>
@@ -10434,7 +10332,7 @@
             </p:txBody>
           </p:sp>
         </mc:Choice>
-        <mc:Fallback xmlns="">
+        <mc:Fallback>
           <p:sp>
             <p:nvSpPr>
               <p:cNvPr id="5" name="TextBox 4">
@@ -10451,8 +10349,8 @@
             </p:nvSpPr>
             <p:spPr>
               <a:xfrm>
-                <a:off x="1270000" y="2819200"/>
-                <a:ext cx="5016500" cy="1459887"/>
+                <a:off x="1270000" y="2923801"/>
+                <a:ext cx="5016500" cy="1271438"/>
               </a:xfrm>
               <a:prstGeom prst="rect">
                 <a:avLst/>
@@ -10469,7 +10367,7 @@
               <a:lstStyle/>
               <a:p>
                 <a:r>
-                  <a:rPr lang="zh-CN" altLang="en-US">
+                  <a:rPr lang="zh-Hans-HK" altLang="en-US">
                     <a:noFill/>
                   </a:rPr>
                   <a:t> </a:t>
@@ -10479,8 +10377,8 @@
           </p:sp>
         </mc:Fallback>
       </mc:AlternateContent>
-      <mc:AlternateContent xmlns:mc="http://schemas.openxmlformats.org/markup-compatibility/2006" xmlns:a14="http://schemas.microsoft.com/office/drawing/2010/main">
-        <mc:Choice Requires="a14">
+      <mc:AlternateContent xmlns:mc="http://schemas.openxmlformats.org/markup-compatibility/2006">
+        <mc:Choice xmlns:a14="http://schemas.microsoft.com/office/drawing/2010/main" Requires="a14">
           <p:sp>
             <p:nvSpPr>
               <p:cNvPr id="7" name="TextBox 6">
@@ -10590,55 +10488,34 @@
                               </m:r>
                             </m:num>
                             <m:den>
-                              <m:sSubSup>
-                                <m:sSubSupPr>
+                              <m:sSup>
+                                <m:sSupPr>
                                   <m:ctrlPr>
-                                    <a:rPr lang="en-US" altLang="zh-CN" sz="2400" b="0" i="1" smtClean="0">
-                                      <a:solidFill>
-                                        <a:schemeClr val="tx1"/>
-                                      </a:solidFill>
+                                    <a:rPr lang="en-US" altLang="zh-CN" sz="2400" i="1">
                                       <a:latin typeface="Cambria Math" panose="02040503050406030204" pitchFamily="18" charset="0"/>
                                       <a:cs typeface="Times New Roman" panose="02020603050405020304" pitchFamily="18" charset="0"/>
                                     </a:rPr>
                                   </m:ctrlPr>
-                                </m:sSubSupPr>
+                                </m:sSupPr>
                                 <m:e>
                                   <m:r>
-                                    <a:rPr lang="en-US" altLang="zh-CN" sz="2400" b="0" i="1" smtClean="0">
-                                      <a:solidFill>
-                                        <a:schemeClr val="tx1"/>
-                                      </a:solidFill>
+                                    <a:rPr lang="en-US" altLang="zh-CN" sz="2400" i="1">
                                       <a:latin typeface="Cambria Math" panose="02040503050406030204" pitchFamily="18" charset="0"/>
                                       <a:cs typeface="Times New Roman" panose="02020603050405020304" pitchFamily="18" charset="0"/>
                                     </a:rPr>
                                     <m:t>𝑏</m:t>
                                   </m:r>
                                 </m:e>
-                                <m:sub>
-                                  <m:r>
-                                    <a:rPr lang="en-US" altLang="zh-CN" sz="2400" b="0" i="1" smtClean="0">
-                                      <a:solidFill>
-                                        <a:schemeClr val="tx1"/>
-                                      </a:solidFill>
-                                      <a:latin typeface="Cambria Math" panose="02040503050406030204" pitchFamily="18" charset="0"/>
-                                      <a:cs typeface="Times New Roman" panose="02020603050405020304" pitchFamily="18" charset="0"/>
-                                    </a:rPr>
-                                    <m:t>𝐺</m:t>
-                                  </m:r>
-                                </m:sub>
                                 <m:sup>
                                   <m:r>
-                                    <a:rPr lang="en-US" altLang="zh-CN" sz="2400" b="0" i="1" smtClean="0">
-                                      <a:solidFill>
-                                        <a:schemeClr val="tx1"/>
-                                      </a:solidFill>
+                                    <a:rPr lang="en-US" altLang="zh-CN" sz="2400" i="1">
                                       <a:latin typeface="Cambria Math" panose="02040503050406030204" pitchFamily="18" charset="0"/>
                                       <a:cs typeface="Times New Roman" panose="02020603050405020304" pitchFamily="18" charset="0"/>
                                     </a:rPr>
                                     <m:t>2</m:t>
                                   </m:r>
                                 </m:sup>
-                              </m:sSubSup>
+                              </m:sSup>
                             </m:den>
                           </m:f>
                           <m:sSup>
@@ -10763,7 +10640,7 @@
             </p:txBody>
           </p:sp>
         </mc:Choice>
-        <mc:Fallback xmlns="">
+        <mc:Fallback>
           <p:sp>
             <p:nvSpPr>
               <p:cNvPr id="7" name="TextBox 6">
@@ -10798,7 +10675,7 @@
               <a:lstStyle/>
               <a:p>
                 <a:r>
-                  <a:rPr lang="zh-CN" altLang="en-US">
+                  <a:rPr lang="zh-Hans-HK" altLang="en-US">
                     <a:noFill/>
                   </a:rPr>
                   <a:t> </a:t>
